--- a/3.설계/주가질문답변_설계.pptx
+++ b/3.설계/주가질문답변_설계.pptx
@@ -107,7 +107,41 @@
       </a:defRPr>
     </a:lvl9pPr>
   </p:defaultTextStyle>
+  <p:extLst>
+    <p:ext uri="{EFAFB233-063F-42B5-8137-9DF3F51BA10A}">
+      <p15:sldGuideLst xmlns:p15="http://schemas.microsoft.com/office/powerpoint/2012/main"/>
+    </p:ext>
+  </p:extLst>
 </p:presentation>
+</file>
+
+<file path=ppt/changesInfos/changesInfo1.xml><?xml version="1.0" encoding="utf-8"?>
+<pc:chgInfo xmlns:a="http://schemas.openxmlformats.org/drawingml/2006/main" xmlns:r="http://schemas.openxmlformats.org/officeDocument/2006/relationships" xmlns:ac="http://schemas.microsoft.com/office/drawing/2013/main/command" xmlns:pc="http://schemas.microsoft.com/office/powerpoint/2013/main/command">
+  <pc:docChgLst>
+    <pc:chgData name="정찬우" userId="31bfe40f-d65a-4f1c-afe2-36b934444268" providerId="ADAL" clId="{4CC0855E-9F8C-4BF9-BC98-AE3C1ACE1417}"/>
+    <pc:docChg chg="modSld">
+      <pc:chgData name="정찬우" userId="31bfe40f-d65a-4f1c-afe2-36b934444268" providerId="ADAL" clId="{4CC0855E-9F8C-4BF9-BC98-AE3C1ACE1417}" dt="2024-12-17T03:32:46.425" v="26" actId="20577"/>
+      <pc:docMkLst>
+        <pc:docMk/>
+      </pc:docMkLst>
+      <pc:sldChg chg="modSp mod">
+        <pc:chgData name="정찬우" userId="31bfe40f-d65a-4f1c-afe2-36b934444268" providerId="ADAL" clId="{4CC0855E-9F8C-4BF9-BC98-AE3C1ACE1417}" dt="2024-12-17T03:32:46.425" v="26" actId="20577"/>
+        <pc:sldMkLst>
+          <pc:docMk/>
+          <pc:sldMk cId="940385225" sldId="283"/>
+        </pc:sldMkLst>
+        <pc:spChg chg="mod">
+          <ac:chgData name="정찬우" userId="31bfe40f-d65a-4f1c-afe2-36b934444268" providerId="ADAL" clId="{4CC0855E-9F8C-4BF9-BC98-AE3C1ACE1417}" dt="2024-12-17T03:32:46.425" v="26" actId="20577"/>
+          <ac:spMkLst>
+            <pc:docMk/>
+            <pc:sldMk cId="940385225" sldId="283"/>
+            <ac:spMk id="53" creationId="{461EC24F-28F1-4B16-BE5F-3C37E8D14167}"/>
+          </ac:spMkLst>
+        </pc:spChg>
+      </pc:sldChg>
+    </pc:docChg>
+  </pc:docChgLst>
+</pc:chgInfo>
 </file>
 
 <file path=ppt/notesMasters/notesMaster1.xml><?xml version="1.0" encoding="utf-8"?>
@@ -5481,7 +5515,61 @@
                   </a:solidFill>
                   <a:latin typeface="+mn-ea"/>
                 </a:rPr>
-                <a:t>를 통해 질문으로부터 종목 코드와 해당 날자 추출</a:t>
+                <a:t>를 통해 질문으로부터 종목 코드와 해당 </a:t>
+              </a:r>
+              <a:r>
+                <a:rPr lang="ko-KR" altLang="en-US" sz="933" dirty="0" err="1">
+                  <a:solidFill>
+                    <a:schemeClr val="tx1"/>
+                  </a:solidFill>
+                  <a:latin typeface="+mn-ea"/>
+                </a:rPr>
+                <a:t>날찌</a:t>
+              </a:r>
+              <a:r>
+                <a:rPr lang="ko-KR" altLang="en-US" sz="933" dirty="0">
+                  <a:solidFill>
+                    <a:schemeClr val="tx1"/>
+                  </a:solidFill>
+                  <a:latin typeface="+mn-ea"/>
+                </a:rPr>
+                <a:t> </a:t>
+              </a:r>
+              <a:r>
+                <a:rPr lang="en-US" altLang="ko-KR" sz="933" dirty="0">
+                  <a:solidFill>
+                    <a:schemeClr val="tx1"/>
+                  </a:solidFill>
+                  <a:latin typeface="+mn-ea"/>
+                </a:rPr>
+                <a:t>YYYY/MM</a:t>
+              </a:r>
+              <a:r>
+                <a:rPr lang="en-US" altLang="ko-KR" sz="933">
+                  <a:solidFill>
+                    <a:schemeClr val="tx1"/>
+                  </a:solidFill>
+                  <a:latin typeface="+mn-ea"/>
+                </a:rPr>
+                <a:t>/DD</a:t>
+              </a:r>
+              <a:r>
+                <a:rPr lang="ko-KR" altLang="en-US" sz="933">
+                  <a:solidFill>
+                    <a:schemeClr val="tx1"/>
+                  </a:solidFill>
+                  <a:latin typeface="+mn-ea"/>
+                </a:rPr>
+                <a:t>로 </a:t>
+              </a:r>
+              <a:r>
+                <a:rPr lang="ko-KR" altLang="en-US" sz="933" dirty="0">
+                  <a:solidFill>
+                    <a:schemeClr val="tx1"/>
+                  </a:solidFill>
+                  <a:latin typeface="+mn-ea"/>
+                </a:rPr>
+                <a:t>추출</a:t>
               </a:r>
             </a:p>
           </p:txBody>
